--- a/docs/presentaciones/classes/clase-180-tests-no-parametricos-mann-whitney-wilcoxon-kruskal-wallis-presentacion.pptx
+++ b/docs/presentaciones/classes/clase-180-tests-no-parametricos-mann-whitney-wilcoxon-kruskal-wallis-presentacion.pptx
@@ -4801,7 +4801,7 @@
                 </a:solidFill>
                 <a:latin typeface="Segoe UI"/>
               </a:rPr>
-              <a:t>Primer bloque ejecutable del notebook.</a:t>
+              <a:t>H₀: P(X &gt; Y) = 0.5. Trabaja sobre rangos, no sobre medias. El effect size es la rank-biserial r = 1 - 2U/(n₁·n₂).</a:t>
             </a:r>
           </a:p>
         </p:txBody>
@@ -4888,7 +4888,273 @@
                 </a:solidFill>
                 <a:latin typeface="Courier New"/>
               </a:rPr>
-              <a:t># Imports y configuración inicial</a:t>
+              <a:t>import numpy as np</a:t>
+            </a:r>
+          </a:p>
+          <a:p>
+            <a:pPr>
+              <a:defRPr sz="1200" b="0">
+                <a:solidFill>
+                  <a:srgbClr val="F8FAFC"/>
+                </a:solidFill>
+                <a:latin typeface="Courier New"/>
+              </a:defRPr>
+            </a:pPr>
+            <a:r>
+              <a:rPr sz="1200" b="0">
+                <a:solidFill>
+                  <a:srgbClr val="F8FAFC"/>
+                </a:solidFill>
+                <a:latin typeface="Courier New"/>
+              </a:rPr>
+              <a:t>from scipy import stats</a:t>
+            </a:r>
+          </a:p>
+          <a:p>
+            <a:pPr>
+              <a:defRPr sz="1200" b="0">
+                <a:solidFill>
+                  <a:srgbClr val="F8FAFC"/>
+                </a:solidFill>
+                <a:latin typeface="Courier New"/>
+              </a:defRPr>
+            </a:pPr>
+            <a:r>
+              <a:rPr sz="1200" b="0">
+                <a:solidFill>
+                  <a:srgbClr val="F8FAFC"/>
+                </a:solidFill>
+                <a:latin typeface="Courier New"/>
+              </a:rPr>
+              <a:t>from statsmodels.stats.multitest import multipletests</a:t>
+            </a:r>
+          </a:p>
+          <a:p>
+            <a:pPr>
+              <a:defRPr sz="1200" b="0">
+                <a:solidFill>
+                  <a:srgbClr val="F8FAFC"/>
+                </a:solidFill>
+                <a:latin typeface="Courier New"/>
+              </a:defRPr>
+            </a:pPr>
+            <a:r>
+              <a:rPr sz="1200" b="0">
+                <a:solidFill>
+                  <a:srgbClr val="F8FAFC"/>
+                </a:solidFill>
+                <a:latin typeface="Courier New"/>
+              </a:rPr>
+              <a:t>import matplotlib.pyplot as plt</a:t>
+            </a:r>
+          </a:p>
+          <a:p>
+            <a:pPr>
+              <a:defRPr sz="1200" b="0">
+                <a:solidFill>
+                  <a:srgbClr val="F8FAFC"/>
+                </a:solidFill>
+                <a:latin typeface="Courier New"/>
+              </a:defRPr>
+            </a:pPr>
+            <a:r>
+              <a:rPr sz="1200" b="0">
+                <a:solidFill>
+                  <a:srgbClr val="F8FAFC"/>
+                </a:solidFill>
+                <a:latin typeface="Courier New"/>
+              </a:rPr>
+              <a:t> </a:t>
+            </a:r>
+          </a:p>
+          <a:p>
+            <a:pPr>
+              <a:defRPr sz="1200" b="0">
+                <a:solidFill>
+                  <a:srgbClr val="F8FAFC"/>
+                </a:solidFill>
+                <a:latin typeface="Courier New"/>
+              </a:defRPr>
+            </a:pPr>
+            <a:r>
+              <a:rPr sz="1200" b="0">
+                <a:solidFill>
+                  <a:srgbClr val="F8FAFC"/>
+                </a:solidFill>
+                <a:latin typeface="Courier New"/>
+              </a:rPr>
+              <a:t>rng = np.random.default_rng(42)</a:t>
+            </a:r>
+          </a:p>
+          <a:p>
+            <a:pPr>
+              <a:defRPr sz="1200" b="0">
+                <a:solidFill>
+                  <a:srgbClr val="F8FAFC"/>
+                </a:solidFill>
+                <a:latin typeface="Courier New"/>
+              </a:defRPr>
+            </a:pPr>
+            <a:r>
+              <a:rPr sz="1200" b="0">
+                <a:solidFill>
+                  <a:srgbClr val="F8FAFC"/>
+                </a:solidFill>
+                <a:latin typeface="Courier New"/>
+              </a:rPr>
+              <a:t> </a:t>
+            </a:r>
+          </a:p>
+          <a:p>
+            <a:pPr>
+              <a:defRPr sz="1200" b="0">
+                <a:solidFill>
+                  <a:srgbClr val="F8FAFC"/>
+                </a:solidFill>
+                <a:latin typeface="Courier New"/>
+              </a:defRPr>
+            </a:pPr>
+            <a:r>
+              <a:rPr sz="1200" b="0">
+                <a:solidFill>
+                  <a:srgbClr val="F8FAFC"/>
+                </a:solidFill>
+                <a:latin typeface="Courier New"/>
+              </a:rPr>
+              <a:t>a = rng.lognormal(1.0, 0.5, 80)     # asimétricos: el t-test es dudoso</a:t>
+            </a:r>
+          </a:p>
+          <a:p>
+            <a:pPr>
+              <a:defRPr sz="1200" b="0">
+                <a:solidFill>
+                  <a:srgbClr val="F8FAFC"/>
+                </a:solidFill>
+                <a:latin typeface="Courier New"/>
+              </a:defRPr>
+            </a:pPr>
+            <a:r>
+              <a:rPr sz="1200" b="0">
+                <a:solidFill>
+                  <a:srgbClr val="F8FAFC"/>
+                </a:solidFill>
+                <a:latin typeface="Courier New"/>
+              </a:rPr>
+              <a:t>b = rng.lognormal(1.25, 0.5, 90)</a:t>
+            </a:r>
+          </a:p>
+          <a:p>
+            <a:pPr>
+              <a:defRPr sz="1200" b="0">
+                <a:solidFill>
+                  <a:srgbClr val="F8FAFC"/>
+                </a:solidFill>
+                <a:latin typeface="Courier New"/>
+              </a:defRPr>
+            </a:pPr>
+            <a:r>
+              <a:rPr sz="1200" b="0">
+                <a:solidFill>
+                  <a:srgbClr val="F8FAFC"/>
+                </a:solidFill>
+                <a:latin typeface="Courier New"/>
+              </a:rPr>
+              <a:t>U, p = stats.mannwhitneyu(a, b, alternative="two-sided")</a:t>
+            </a:r>
+          </a:p>
+          <a:p>
+            <a:pPr>
+              <a:defRPr sz="1200" b="0">
+                <a:solidFill>
+                  <a:srgbClr val="F8FAFC"/>
+                </a:solidFill>
+                <a:latin typeface="Courier New"/>
+              </a:defRPr>
+            </a:pPr>
+            <a:r>
+              <a:rPr sz="1200" b="0">
+                <a:solidFill>
+                  <a:srgbClr val="F8FAFC"/>
+                </a:solidFill>
+                <a:latin typeface="Courier New"/>
+              </a:rPr>
+              <a:t>r_rb = 1 - 2 * U / (len(a) * len(b))</a:t>
+            </a:r>
+          </a:p>
+          <a:p>
+            <a:pPr>
+              <a:defRPr sz="1200" b="0">
+                <a:solidFill>
+                  <a:srgbClr val="F8FAFC"/>
+                </a:solidFill>
+                <a:latin typeface="Courier New"/>
+              </a:defRPr>
+            </a:pPr>
+            <a:r>
+              <a:rPr sz="1200" b="0">
+                <a:solidFill>
+                  <a:srgbClr val="F8FAFC"/>
+                </a:solidFill>
+                <a:latin typeface="Courier New"/>
+              </a:rPr>
+              <a:t>print(f"Mann-Whitney U={U:.0f}  p={p:.4f}")</a:t>
+            </a:r>
+          </a:p>
+          <a:p>
+            <a:pPr>
+              <a:defRPr sz="1200" b="0">
+                <a:solidFill>
+                  <a:srgbClr val="F8FAFC"/>
+                </a:solidFill>
+                <a:latin typeface="Courier New"/>
+              </a:defRPr>
+            </a:pPr>
+            <a:r>
+              <a:rPr sz="1200" b="0">
+                <a:solidFill>
+                  <a:srgbClr val="F8FAFC"/>
+                </a:solidFill>
+                <a:latin typeface="Courier New"/>
+              </a:rPr>
+              <a:t>print(f"rank-biserial r = {r_rb:.3f}")</a:t>
+            </a:r>
+          </a:p>
+          <a:p>
+            <a:pPr>
+              <a:defRPr sz="1200" b="0">
+                <a:solidFill>
+                  <a:srgbClr val="F8FAFC"/>
+                </a:solidFill>
+                <a:latin typeface="Courier New"/>
+              </a:defRPr>
+            </a:pPr>
+            <a:r>
+              <a:rPr sz="1200" b="0">
+                <a:solidFill>
+                  <a:srgbClr val="F8FAFC"/>
+                </a:solidFill>
+                <a:latin typeface="Courier New"/>
+              </a:rPr>
+              <a:t>print(f"medianas: a={np.median(a):.2f}  b={np.median(b):.2f}")</a:t>
+            </a:r>
+          </a:p>
+          <a:p>
+            <a:pPr>
+              <a:defRPr sz="1200" b="0">
+                <a:solidFill>
+                  <a:srgbClr val="F8FAFC"/>
+                </a:solidFill>
+                <a:latin typeface="Courier New"/>
+              </a:defRPr>
+            </a:pPr>
+            <a:r>
+              <a:rPr sz="1200" b="0">
+                <a:solidFill>
+                  <a:srgbClr val="F8FAFC"/>
+                </a:solidFill>
+                <a:latin typeface="Courier New"/>
+              </a:rPr>
+              <a:t>assert p &lt; 0.05</a:t>
             </a:r>
           </a:p>
         </p:txBody>

--- a/docs/presentaciones/classes/clase-180-tests-no-parametricos-mann-whitney-wilcoxon-kruskal-wallis-presentacion.pptx
+++ b/docs/presentaciones/classes/clase-180-tests-no-parametricos-mann-whitney-wilcoxon-kruskal-wallis-presentacion.pptx
@@ -3272,7 +3272,7 @@
                 </a:solidFill>
                 <a:latin typeface="Segoe UI"/>
               </a:rPr>
-              <a:t>Parte: 3 — Estadística Inferencial y Causal · Fuente: Bruce &amp; Bruce, cap. 3 Resampling and Non-parametric Tests + Conover, Practical Nonparametric Statistics.  Duración estimada: 70 min.</a:t>
+              <a:t>Parte: 3 — Estadística Inferencial y Causal · Fuente: Bruce &amp; Bruce, cap. 3 Resampling and Non-parametric Tests + Conover, Practical Nonparametric Statistics.  Duración estimada: 70 min. · Nivel: Intermedio-Avanzado</a:t>
             </a:r>
           </a:p>
         </p:txBody>
@@ -3581,7 +3581,7 @@
                 </a:solidFill>
                 <a:latin typeface="Segoe UI"/>
               </a:rPr>
-              <a:t>Parte: 3 — Estadística Inferencial y Causal · Fuente: Bruce &amp; Bruce, cap. 3 Resampling and Non-parametric Tests + Conover, Practical Nonparametric Statistics.  Duración estimada: 70 min.</a:t>
+              <a:t>Parte: 3 — Estadística Inferencial y Causal · Fuente: Bruce &amp; Bruce, cap. 3 Resampling and Non-parametric Tests + Conover, Practical Nonparametric Statistics.  Duración estimada: 70 min. · Nivel: Intermedio-Avanzado</a:t>
             </a:r>
           </a:p>
         </p:txBody>
